--- a/kubernetes/00_intro.pptx
+++ b/kubernetes/00_intro.pptx
@@ -5,24 +5,25 @@
     <p:sldMasterId id="2147483733" r:id="rId1"/>
   </p:sldMasterIdLst>
   <p:notesMasterIdLst>
-    <p:notesMasterId r:id="rId14"/>
+    <p:notesMasterId r:id="rId15"/>
   </p:notesMasterIdLst>
   <p:handoutMasterIdLst>
-    <p:handoutMasterId r:id="rId15"/>
+    <p:handoutMasterId r:id="rId16"/>
   </p:handoutMasterIdLst>
   <p:sldIdLst>
     <p:sldId id="433" r:id="rId2"/>
     <p:sldId id="442" r:id="rId3"/>
     <p:sldId id="446" r:id="rId4"/>
     <p:sldId id="450" r:id="rId5"/>
-    <p:sldId id="516" r:id="rId6"/>
-    <p:sldId id="449" r:id="rId7"/>
-    <p:sldId id="454" r:id="rId8"/>
-    <p:sldId id="447" r:id="rId9"/>
-    <p:sldId id="517" r:id="rId10"/>
-    <p:sldId id="448" r:id="rId11"/>
-    <p:sldId id="515" r:id="rId12"/>
-    <p:sldId id="265" r:id="rId13"/>
+    <p:sldId id="518" r:id="rId6"/>
+    <p:sldId id="516" r:id="rId7"/>
+    <p:sldId id="449" r:id="rId8"/>
+    <p:sldId id="454" r:id="rId9"/>
+    <p:sldId id="447" r:id="rId10"/>
+    <p:sldId id="517" r:id="rId11"/>
+    <p:sldId id="448" r:id="rId12"/>
+    <p:sldId id="515" r:id="rId13"/>
+    <p:sldId id="265" r:id="rId14"/>
   </p:sldIdLst>
   <p:sldSz cx="12195175" cy="6858000"/>
   <p:notesSz cx="20561300" cy="29452888"/>
@@ -630,6 +631,133 @@
       </p:grpSpPr>
       <p:sp>
         <p:nvSpPr>
+          <p:cNvPr id="2" name="Slide Image Placeholder 1"/>
+          <p:cNvSpPr>
+            <a:spLocks noGrp="1" noRot="1" noChangeAspect="1"/>
+          </p:cNvSpPr>
+          <p:nvPr>
+            <p:ph type="sldImg"/>
+          </p:nvPr>
+        </p:nvSpPr>
+        <p:spPr/>
+      </p:sp>
+      <p:sp>
+        <p:nvSpPr>
+          <p:cNvPr id="3" name="Notes Placeholder 2"/>
+          <p:cNvSpPr>
+            <a:spLocks noGrp="1"/>
+          </p:cNvSpPr>
+          <p:nvPr>
+            <p:ph type="body" idx="1"/>
+          </p:nvPr>
+        </p:nvSpPr>
+        <p:spPr/>
+        <p:txBody>
+          <a:bodyPr/>
+          <a:lstStyle/>
+          <a:p>
+            <a:r>
+              <a:rPr lang="en-US" dirty="0"/>
+              <a:t>Kubernetes itself is something between infrastructure and platform. It is not as opinionated as cloud foundry but provides more than pure IaaS provider.</a:t>
+            </a:r>
+          </a:p>
+          <a:p>
+            <a:r>
+              <a:rPr lang="en-US" dirty="0"/>
+              <a:t>When combining K8s with addons such as </a:t>
+            </a:r>
+            <a:r>
+              <a:rPr lang="en-US" dirty="0" err="1"/>
+              <a:t>Kyma</a:t>
+            </a:r>
+            <a:r>
+              <a:rPr lang="en-US" dirty="0"/>
+              <a:t> or </a:t>
+            </a:r>
+            <a:r>
+              <a:rPr lang="en-US" dirty="0" err="1"/>
+              <a:t>Knative</a:t>
+            </a:r>
+            <a:r>
+              <a:rPr lang="en-US" dirty="0"/>
+              <a:t>, it is possible to move up the stack and provider higher level services.</a:t>
+            </a:r>
+          </a:p>
+          <a:p>
+            <a:endParaRPr lang="en-US" dirty="0"/>
+          </a:p>
+          <a:p>
+            <a:r>
+              <a:rPr lang="en-US" dirty="0"/>
+              <a:t>If there has to be a classification, it’s probably fair to say that K8s provides a runtime environment for applications of all kind</a:t>
+            </a:r>
+            <a:r>
+              <a:rPr lang="en-US"/>
+              <a:t>. </a:t>
+            </a:r>
+            <a:endParaRPr lang="en-US" dirty="0"/>
+          </a:p>
+          <a:p>
+            <a:endParaRPr lang="en-US" dirty="0"/>
+          </a:p>
+        </p:txBody>
+      </p:sp>
+      <p:sp>
+        <p:nvSpPr>
+          <p:cNvPr id="4" name="Slide Number Placeholder 3"/>
+          <p:cNvSpPr>
+            <a:spLocks noGrp="1"/>
+          </p:cNvSpPr>
+          <p:nvPr>
+            <p:ph type="sldNum" sz="quarter" idx="5"/>
+          </p:nvPr>
+        </p:nvSpPr>
+        <p:spPr/>
+        <p:txBody>
+          <a:bodyPr/>
+          <a:lstStyle/>
+          <a:p>
+            <a:fld id="{7D8C2C35-2B8A-446E-BEC0-FD36716C29AC}" type="slidenum">
+              <a:rPr lang="de-DE" smtClean="0"/>
+              <a:pPr/>
+              <a:t>12</a:t>
+            </a:fld>
+            <a:endParaRPr lang="de-DE" dirty="0"/>
+          </a:p>
+        </p:txBody>
+      </p:sp>
+    </p:spTree>
+    <p:extLst>
+      <p:ext uri="{BB962C8B-B14F-4D97-AF65-F5344CB8AC3E}">
+        <p14:creationId xmlns:p14="http://schemas.microsoft.com/office/powerpoint/2010/main" val="3588197788"/>
+      </p:ext>
+    </p:extLst>
+  </p:cSld>
+  <p:clrMapOvr>
+    <a:masterClrMapping/>
+  </p:clrMapOvr>
+</p:notes>
+</file>
+
+<file path=ppt/notesSlides/notesSlide11.xml><?xml version="1.0" encoding="utf-8"?>
+<p:notes xmlns:a="http://schemas.openxmlformats.org/drawingml/2006/main" xmlns:r="http://schemas.openxmlformats.org/officeDocument/2006/relationships" xmlns:p="http://schemas.openxmlformats.org/presentationml/2006/main">
+  <p:cSld>
+    <p:spTree>
+      <p:nvGrpSpPr>
+        <p:cNvPr id="1" name=""/>
+        <p:cNvGrpSpPr/>
+        <p:nvPr/>
+      </p:nvGrpSpPr>
+      <p:grpSpPr>
+        <a:xfrm>
+          <a:off x="0" y="0"/>
+          <a:ext cx="0" cy="0"/>
+          <a:chOff x="0" y="0"/>
+          <a:chExt cx="0" cy="0"/>
+        </a:xfrm>
+      </p:grpSpPr>
+      <p:sp>
+        <p:nvSpPr>
           <p:cNvPr id="4" name="Slide Number Placeholder 3"/>
           <p:cNvSpPr>
             <a:spLocks noGrp="1"/>
@@ -646,7 +774,7 @@
             <a:fld id="{7D8C2C35-2B8A-446E-BEC0-FD36716C29AC}" type="slidenum">
               <a:rPr lang="de-DE" smtClean="0"/>
               <a:pPr/>
-              <a:t>12</a:t>
+              <a:t>13</a:t>
             </a:fld>
             <a:endParaRPr lang="de-DE" dirty="0"/>
           </a:p>
@@ -1037,19 +1165,14 @@
           <a:p>
             <a:r>
               <a:rPr lang="en-US" dirty="0"/>
-              <a:t>Kubernetes orchestrates your workloads &amp; applications – also several of them in parallel.</a:t>
-            </a:r>
-          </a:p>
-          <a:p>
-            <a:r>
-              <a:rPr lang="en-US" dirty="0"/>
-              <a:t>In order to put this picture together, we will look at different dimensions during the training</a:t>
-            </a:r>
-            <a:r>
-              <a:rPr lang="en-US"/>
-              <a:t>. </a:t>
-            </a:r>
-            <a:endParaRPr lang="en-US" dirty="0"/>
+              <a:t>Kubernetes takes a “construction plan” and instantiates it as often as you want – as long as you have enough resources</a:t>
+            </a:r>
+          </a:p>
+          <a:p>
+            <a:r>
+              <a:rPr lang="en-US" dirty="0"/>
+              <a:t>What you describe, is what you get.</a:t>
+            </a:r>
           </a:p>
         </p:txBody>
       </p:sp>
@@ -1071,7 +1194,7 @@
             <a:fld id="{7D8C2C35-2B8A-446E-BEC0-FD36716C29AC}" type="slidenum">
               <a:rPr lang="de-DE" smtClean="0"/>
               <a:pPr/>
-              <a:t>6</a:t>
+              <a:t>5</a:t>
             </a:fld>
             <a:endParaRPr lang="de-DE" dirty="0"/>
           </a:p>
@@ -1080,7 +1203,7 @@
     </p:spTree>
     <p:extLst>
       <p:ext uri="{BB962C8B-B14F-4D97-AF65-F5344CB8AC3E}">
-        <p14:creationId xmlns:p14="http://schemas.microsoft.com/office/powerpoint/2010/main" val="2088780993"/>
+        <p14:creationId xmlns:p14="http://schemas.microsoft.com/office/powerpoint/2010/main" val="1493564457"/>
       </p:ext>
     </p:extLst>
   </p:cSld>
@@ -1131,160 +1254,24 @@
         </p:nvSpPr>
         <p:spPr/>
         <p:txBody>
-          <a:bodyPr>
-            <a:normAutofit/>
-          </a:bodyPr>
+          <a:bodyPr/>
           <a:lstStyle/>
           <a:p>
-            <a:pPr marL="859907" indent="-859907">
-              <a:buFontTx/>
-              <a:buChar char="-"/>
-            </a:pPr>
-            <a:r>
-              <a:rPr lang="en-US" dirty="0"/>
-              <a:t>The demo is based on the “sock shop” e-commerce platform developed by </a:t>
-            </a:r>
-            <a:r>
-              <a:rPr lang="en-US" dirty="0" err="1"/>
-              <a:t>weaveworks</a:t>
-            </a:r>
-            <a:r>
-              <a:rPr lang="en-US" dirty="0"/>
-              <a:t>. This is a full-blown demo application, including content – however you have to wait ~2min until the content is fully loaded. </a:t>
-            </a:r>
-          </a:p>
-          <a:p>
-            <a:pPr marL="859907" indent="-859907">
-              <a:buFontTx/>
-              <a:buChar char="-"/>
-            </a:pPr>
+            <a:r>
+              <a:rPr lang="en-US" dirty="0"/>
+              <a:t>Kubernetes orchestrates your workloads &amp; applications – also several of them in parallel.</a:t>
+            </a:r>
+          </a:p>
+          <a:p>
+            <a:r>
+              <a:rPr lang="en-US" dirty="0"/>
+              <a:t>In order to put this picture together, we will look at different dimensions during the training</a:t>
+            </a:r>
+            <a:r>
+              <a:rPr lang="en-US"/>
+              <a:t>. </a:t>
+            </a:r>
             <a:endParaRPr lang="en-US" dirty="0"/>
-          </a:p>
-          <a:p>
-            <a:pPr marL="859907" indent="-859907">
-              <a:buFontTx/>
-              <a:buChar char="-"/>
-            </a:pPr>
-            <a:r>
-              <a:rPr lang="en-US" dirty="0"/>
-              <a:t>To demo use the sock-</a:t>
-            </a:r>
-            <a:r>
-              <a:rPr lang="en-US" dirty="0" err="1"/>
-              <a:t>shop.yaml</a:t>
-            </a:r>
-            <a:r>
-              <a:rPr lang="en-US" dirty="0"/>
-              <a:t> from the </a:t>
-            </a:r>
-            <a:r>
-              <a:rPr lang="en-US" dirty="0" err="1"/>
-              <a:t>kubernetes</a:t>
-            </a:r>
-            <a:r>
-              <a:rPr lang="en-US" dirty="0"/>
-              <a:t>/demo folder to deploy all components. Adapt the host on the Ingress according to the cluster-name and project-name, used within your training (line with ‘host: sock-</a:t>
-            </a:r>
-            <a:r>
-              <a:rPr lang="en-US" dirty="0" err="1"/>
-              <a:t>shop.ingress</a:t>
-            </a:r>
-            <a:r>
-              <a:rPr lang="en-US" dirty="0"/>
-              <a:t>.&lt;cluster-name&gt;.&lt;project-name&gt;.shoot.canary.k8s-hana.ondemand.com’) before you call ‘</a:t>
-            </a:r>
-            <a:r>
-              <a:rPr lang="en-US" dirty="0" err="1"/>
-              <a:t>kubectl</a:t>
-            </a:r>
-            <a:r>
-              <a:rPr lang="en-US" dirty="0"/>
-              <a:t> apply –f sock-</a:t>
-            </a:r>
-            <a:r>
-              <a:rPr lang="en-US" dirty="0" err="1"/>
-              <a:t>shop.yaml</a:t>
-            </a:r>
-            <a:r>
-              <a:rPr lang="en-US" dirty="0"/>
-              <a:t>’.</a:t>
-            </a:r>
-          </a:p>
-          <a:p>
-            <a:pPr marL="859907" indent="-859907">
-              <a:buFontTx/>
-              <a:buChar char="-"/>
-            </a:pPr>
-            <a:endParaRPr lang="en-US" dirty="0"/>
-          </a:p>
-          <a:p>
-            <a:pPr marL="859907" indent="-859907">
-              <a:buFontTx/>
-              <a:buChar char="-"/>
-            </a:pPr>
-            <a:r>
-              <a:rPr lang="en-US" dirty="0"/>
-              <a:t>To show how K8s works, just delete a pod and see how the sock-shop still works properly.</a:t>
-            </a:r>
-          </a:p>
-          <a:p>
-            <a:pPr marL="859907" indent="-859907">
-              <a:buFontTx/>
-              <a:buChar char="-"/>
-            </a:pPr>
-            <a:endParaRPr lang="en-US" dirty="0"/>
-          </a:p>
-          <a:p>
-            <a:pPr marL="859907" indent="-859907">
-              <a:buFontTx/>
-              <a:buChar char="-"/>
-            </a:pPr>
-            <a:r>
-              <a:rPr lang="en-US" dirty="0"/>
-              <a:t>You can find all needed K8s entities in the namespace ‘sock-shop’, which gets automatically created.</a:t>
-            </a:r>
-          </a:p>
-          <a:p>
-            <a:pPr marL="859907" indent="-859907">
-              <a:buFontTx/>
-              <a:buChar char="-"/>
-            </a:pPr>
-            <a:endParaRPr lang="en-US" dirty="0"/>
-          </a:p>
-          <a:p>
-            <a:pPr marL="859907" indent="-859907">
-              <a:buFontTx/>
-              <a:buChar char="-"/>
-            </a:pPr>
-            <a:r>
-              <a:rPr lang="en-US" dirty="0"/>
-              <a:t>The URL to call the sock-shop in the browser is: sock-</a:t>
-            </a:r>
-            <a:r>
-              <a:rPr lang="en-US" dirty="0" err="1"/>
-              <a:t>shop.ingress</a:t>
-            </a:r>
-            <a:r>
-              <a:rPr lang="en-US" dirty="0"/>
-              <a:t>.&lt;cluster-name&gt;.&lt;project-name&gt;.shoot.canary.k8s-hana.ondemand.com (e.g. http://sock-shop.ingress.wdfcw43a.k8s-train.shoot.canary.k8s-hana.ondemand.com/)</a:t>
-            </a:r>
-          </a:p>
-          <a:p>
-            <a:pPr marL="859907" indent="-859907">
-              <a:buFontTx/>
-              <a:buChar char="-"/>
-            </a:pPr>
-            <a:endParaRPr lang="en-US" dirty="0"/>
-          </a:p>
-          <a:p>
-            <a:pPr marL="859907" indent="-859907">
-              <a:buFontTx/>
-              <a:buChar char="-"/>
-            </a:pPr>
-            <a:r>
-              <a:rPr lang="en-US" dirty="0"/>
-              <a:t>The design of the sock-shop is based a micro-services architecture and was containerized appropriately. See https://github.com/microservices-demo/microservices-demo/blob/master/internal-docs/design.md for further details</a:t>
-            </a:r>
           </a:p>
         </p:txBody>
       </p:sp>
@@ -1315,7 +1302,7 @@
     </p:spTree>
     <p:extLst>
       <p:ext uri="{BB962C8B-B14F-4D97-AF65-F5344CB8AC3E}">
-        <p14:creationId xmlns:p14="http://schemas.microsoft.com/office/powerpoint/2010/main" val="1711056181"/>
+        <p14:creationId xmlns:p14="http://schemas.microsoft.com/office/powerpoint/2010/main" val="2088780993"/>
       </p:ext>
     </p:extLst>
   </p:cSld>
@@ -1366,10 +1353,160 @@
         </p:nvSpPr>
         <p:spPr/>
         <p:txBody>
-          <a:bodyPr/>
+          <a:bodyPr>
+            <a:normAutofit/>
+          </a:bodyPr>
           <a:lstStyle/>
           <a:p>
-            <a:endParaRPr lang="en-US"/>
+            <a:pPr marL="859907" indent="-859907">
+              <a:buFontTx/>
+              <a:buChar char="-"/>
+            </a:pPr>
+            <a:r>
+              <a:rPr lang="en-US" dirty="0"/>
+              <a:t>The demo is based on the “sock shop” e-commerce platform developed by </a:t>
+            </a:r>
+            <a:r>
+              <a:rPr lang="en-US" dirty="0" err="1"/>
+              <a:t>weaveworks</a:t>
+            </a:r>
+            <a:r>
+              <a:rPr lang="en-US" dirty="0"/>
+              <a:t>. This is a full-blown demo application, including content – however you have to wait ~2min until the content is fully loaded. </a:t>
+            </a:r>
+          </a:p>
+          <a:p>
+            <a:pPr marL="859907" indent="-859907">
+              <a:buFontTx/>
+              <a:buChar char="-"/>
+            </a:pPr>
+            <a:endParaRPr lang="en-US" dirty="0"/>
+          </a:p>
+          <a:p>
+            <a:pPr marL="859907" indent="-859907">
+              <a:buFontTx/>
+              <a:buChar char="-"/>
+            </a:pPr>
+            <a:r>
+              <a:rPr lang="en-US" dirty="0"/>
+              <a:t>To demo use the sock-</a:t>
+            </a:r>
+            <a:r>
+              <a:rPr lang="en-US" dirty="0" err="1"/>
+              <a:t>shop.yaml</a:t>
+            </a:r>
+            <a:r>
+              <a:rPr lang="en-US" dirty="0"/>
+              <a:t> from the </a:t>
+            </a:r>
+            <a:r>
+              <a:rPr lang="en-US" dirty="0" err="1"/>
+              <a:t>kubernetes</a:t>
+            </a:r>
+            <a:r>
+              <a:rPr lang="en-US" dirty="0"/>
+              <a:t>/demo folder to deploy all components. Adapt the host on the Ingress according to the cluster-name and project-name, used within your training (line with ‘host: sock-</a:t>
+            </a:r>
+            <a:r>
+              <a:rPr lang="en-US" dirty="0" err="1"/>
+              <a:t>shop.ingress</a:t>
+            </a:r>
+            <a:r>
+              <a:rPr lang="en-US" dirty="0"/>
+              <a:t>.&lt;cluster-name&gt;.&lt;project-name&gt;.shoot.canary.k8s-hana.ondemand.com’) before you call ‘</a:t>
+            </a:r>
+            <a:r>
+              <a:rPr lang="en-US" dirty="0" err="1"/>
+              <a:t>kubectl</a:t>
+            </a:r>
+            <a:r>
+              <a:rPr lang="en-US" dirty="0"/>
+              <a:t> apply –f sock-</a:t>
+            </a:r>
+            <a:r>
+              <a:rPr lang="en-US" dirty="0" err="1"/>
+              <a:t>shop.yaml</a:t>
+            </a:r>
+            <a:r>
+              <a:rPr lang="en-US" dirty="0"/>
+              <a:t>’.</a:t>
+            </a:r>
+          </a:p>
+          <a:p>
+            <a:pPr marL="859907" indent="-859907">
+              <a:buFontTx/>
+              <a:buChar char="-"/>
+            </a:pPr>
+            <a:endParaRPr lang="en-US" dirty="0"/>
+          </a:p>
+          <a:p>
+            <a:pPr marL="859907" indent="-859907">
+              <a:buFontTx/>
+              <a:buChar char="-"/>
+            </a:pPr>
+            <a:r>
+              <a:rPr lang="en-US" dirty="0"/>
+              <a:t>To show how K8s works, just delete a pod and see how the sock-shop still works properly.</a:t>
+            </a:r>
+          </a:p>
+          <a:p>
+            <a:pPr marL="859907" indent="-859907">
+              <a:buFontTx/>
+              <a:buChar char="-"/>
+            </a:pPr>
+            <a:endParaRPr lang="en-US" dirty="0"/>
+          </a:p>
+          <a:p>
+            <a:pPr marL="859907" indent="-859907">
+              <a:buFontTx/>
+              <a:buChar char="-"/>
+            </a:pPr>
+            <a:r>
+              <a:rPr lang="en-US" dirty="0"/>
+              <a:t>You can find all needed K8s entities in the namespace ‘sock-shop’, which gets automatically created.</a:t>
+            </a:r>
+          </a:p>
+          <a:p>
+            <a:pPr marL="859907" indent="-859907">
+              <a:buFontTx/>
+              <a:buChar char="-"/>
+            </a:pPr>
+            <a:endParaRPr lang="en-US" dirty="0"/>
+          </a:p>
+          <a:p>
+            <a:pPr marL="859907" indent="-859907">
+              <a:buFontTx/>
+              <a:buChar char="-"/>
+            </a:pPr>
+            <a:r>
+              <a:rPr lang="en-US" dirty="0"/>
+              <a:t>The URL to call the sock-shop in the browser is: sock-</a:t>
+            </a:r>
+            <a:r>
+              <a:rPr lang="en-US" dirty="0" err="1"/>
+              <a:t>shop.ingress</a:t>
+            </a:r>
+            <a:r>
+              <a:rPr lang="en-US" dirty="0"/>
+              <a:t>.&lt;cluster-name&gt;.&lt;project-name&gt;.shoot.canary.k8s-hana.ondemand.com (e.g. http://sock-shop.ingress.wdfcw43a.k8s-train.shoot.canary.k8s-hana.ondemand.com/)</a:t>
+            </a:r>
+          </a:p>
+          <a:p>
+            <a:pPr marL="859907" indent="-859907">
+              <a:buFontTx/>
+              <a:buChar char="-"/>
+            </a:pPr>
+            <a:endParaRPr lang="en-US" dirty="0"/>
+          </a:p>
+          <a:p>
+            <a:pPr marL="859907" indent="-859907">
+              <a:buFontTx/>
+              <a:buChar char="-"/>
+            </a:pPr>
+            <a:r>
+              <a:rPr lang="en-US" dirty="0"/>
+              <a:t>The design of the sock-shop is based a micro-services architecture and was containerized appropriately. See https://github.com/microservices-demo/microservices-demo/blob/master/internal-docs/design.md for further details</a:t>
+            </a:r>
           </a:p>
         </p:txBody>
       </p:sp>
@@ -1400,7 +1537,7 @@
     </p:spTree>
     <p:extLst>
       <p:ext uri="{BB962C8B-B14F-4D97-AF65-F5344CB8AC3E}">
-        <p14:creationId xmlns:p14="http://schemas.microsoft.com/office/powerpoint/2010/main" val="467728202"/>
+        <p14:creationId xmlns:p14="http://schemas.microsoft.com/office/powerpoint/2010/main" val="1711056181"/>
       </p:ext>
     </p:extLst>
   </p:cSld>
@@ -1476,7 +1613,7 @@
             <a:fld id="{7D8C2C35-2B8A-446E-BEC0-FD36716C29AC}" type="slidenum">
               <a:rPr lang="de-DE" smtClean="0"/>
               <a:pPr/>
-              <a:t>10</a:t>
+              <a:t>9</a:t>
             </a:fld>
             <a:endParaRPr lang="de-DE" dirty="0"/>
           </a:p>
@@ -1485,7 +1622,7 @@
     </p:spTree>
     <p:extLst>
       <p:ext uri="{BB962C8B-B14F-4D97-AF65-F5344CB8AC3E}">
-        <p14:creationId xmlns:p14="http://schemas.microsoft.com/office/powerpoint/2010/main" val="1146731827"/>
+        <p14:creationId xmlns:p14="http://schemas.microsoft.com/office/powerpoint/2010/main" val="467728202"/>
       </p:ext>
     </p:extLst>
   </p:cSld>
@@ -1539,49 +1676,7 @@
           <a:bodyPr/>
           <a:lstStyle/>
           <a:p>
-            <a:r>
-              <a:rPr lang="en-US" dirty="0"/>
-              <a:t>Kubernetes itself is something between infrastructure and platform. It is not as opinionated as cloud foundry but provides more than pure IaaS provider.</a:t>
-            </a:r>
-          </a:p>
-          <a:p>
-            <a:r>
-              <a:rPr lang="en-US" dirty="0"/>
-              <a:t>When combining K8s with addons such as </a:t>
-            </a:r>
-            <a:r>
-              <a:rPr lang="en-US" dirty="0" err="1"/>
-              <a:t>Kyma</a:t>
-            </a:r>
-            <a:r>
-              <a:rPr lang="en-US" dirty="0"/>
-              <a:t> or </a:t>
-            </a:r>
-            <a:r>
-              <a:rPr lang="en-US" dirty="0" err="1"/>
-              <a:t>Knative</a:t>
-            </a:r>
-            <a:r>
-              <a:rPr lang="en-US" dirty="0"/>
-              <a:t>, it is possible to move up the stack and provider higher level services.</a:t>
-            </a:r>
-          </a:p>
-          <a:p>
-            <a:endParaRPr lang="en-US" dirty="0"/>
-          </a:p>
-          <a:p>
-            <a:r>
-              <a:rPr lang="en-US" dirty="0"/>
-              <a:t>If there has to be a classification, it’s probably fair to say that K8s provides a runtime environment for applications of all kind</a:t>
-            </a:r>
-            <a:r>
-              <a:rPr lang="en-US"/>
-              <a:t>. </a:t>
-            </a:r>
-            <a:endParaRPr lang="en-US" dirty="0"/>
-          </a:p>
-          <a:p>
-            <a:endParaRPr lang="en-US" dirty="0"/>
+            <a:endParaRPr lang="en-US"/>
           </a:p>
         </p:txBody>
       </p:sp>
@@ -1592,7 +1687,7 @@
             <a:spLocks noGrp="1"/>
           </p:cNvSpPr>
           <p:nvPr>
-            <p:ph type="sldNum" sz="quarter" idx="5"/>
+            <p:ph type="sldNum" sz="quarter" idx="10"/>
           </p:nvPr>
         </p:nvSpPr>
         <p:spPr/>
@@ -1612,7 +1707,7 @@
     </p:spTree>
     <p:extLst>
       <p:ext uri="{BB962C8B-B14F-4D97-AF65-F5344CB8AC3E}">
-        <p14:creationId xmlns:p14="http://schemas.microsoft.com/office/powerpoint/2010/main" val="3588197788"/>
+        <p14:creationId xmlns:p14="http://schemas.microsoft.com/office/powerpoint/2010/main" val="1146731827"/>
       </p:ext>
     </p:extLst>
   </p:cSld>
@@ -9293,6 +9388,147 @@
       </p:grpSpPr>
       <p:sp>
         <p:nvSpPr>
+          <p:cNvPr id="2" name="Title 1">
+            <a:extLst>
+              <a:ext uri="{FF2B5EF4-FFF2-40B4-BE49-F238E27FC236}">
+                <a16:creationId xmlns:a16="http://schemas.microsoft.com/office/drawing/2014/main" id="{E582B548-5EEB-4E4A-A8E4-F449F9422596}"/>
+              </a:ext>
+            </a:extLst>
+          </p:cNvPr>
+          <p:cNvSpPr>
+            <a:spLocks noGrp="1"/>
+          </p:cNvSpPr>
+          <p:nvPr>
+            <p:ph type="title"/>
+          </p:nvPr>
+        </p:nvSpPr>
+        <p:spPr/>
+        <p:txBody>
+          <a:bodyPr/>
+          <a:lstStyle/>
+          <a:p>
+            <a:r>
+              <a:rPr lang="en-US" dirty="0"/>
+              <a:t>Documentation</a:t>
+            </a:r>
+          </a:p>
+        </p:txBody>
+      </p:sp>
+      <p:sp>
+        <p:nvSpPr>
+          <p:cNvPr id="3" name="Rectangle 2">
+            <a:extLst>
+              <a:ext uri="{FF2B5EF4-FFF2-40B4-BE49-F238E27FC236}">
+                <a16:creationId xmlns:a16="http://schemas.microsoft.com/office/drawing/2014/main" id="{8D2E5199-2E3E-4166-A8DB-D5A7DE841F4C}"/>
+              </a:ext>
+            </a:extLst>
+          </p:cNvPr>
+          <p:cNvSpPr/>
+          <p:nvPr/>
+        </p:nvSpPr>
+        <p:spPr>
+          <a:xfrm>
+            <a:off x="2394050" y="5739258"/>
+            <a:ext cx="7406377" cy="369332"/>
+          </a:xfrm>
+          <a:prstGeom prst="rect">
+            <a:avLst/>
+          </a:prstGeom>
+        </p:spPr>
+        <p:txBody>
+          <a:bodyPr wrap="square">
+            <a:spAutoFit/>
+          </a:bodyPr>
+          <a:lstStyle/>
+          <a:p>
+            <a:pPr algn="ctr"/>
+            <a:r>
+              <a:rPr lang="de-DE" sz="1800" dirty="0">
+                <a:solidFill>
+                  <a:srgbClr val="000000"/>
+                </a:solidFill>
+                <a:latin typeface="+mj-lt"/>
+                <a:hlinkClick r:id="rId2"/>
+              </a:rPr>
+              <a:t>https://twitter.com/memenetes/status/1305612451443023876?s=20</a:t>
+            </a:r>
+            <a:r>
+              <a:rPr lang="de-DE" sz="1800" dirty="0">
+                <a:solidFill>
+                  <a:srgbClr val="000000"/>
+                </a:solidFill>
+                <a:latin typeface="+mj-lt"/>
+              </a:rPr>
+              <a:t> </a:t>
+            </a:r>
+            <a:endParaRPr lang="en-US" sz="1800" dirty="0">
+              <a:latin typeface="+mj-lt"/>
+            </a:endParaRPr>
+          </a:p>
+        </p:txBody>
+      </p:sp>
+      <p:pic>
+        <p:nvPicPr>
+          <p:cNvPr id="4" name="Picture 3">
+            <a:extLst>
+              <a:ext uri="{FF2B5EF4-FFF2-40B4-BE49-F238E27FC236}">
+                <a16:creationId xmlns:a16="http://schemas.microsoft.com/office/drawing/2014/main" id="{0B682552-E443-46F1-8B3B-E9EA8D5CEBE7}"/>
+              </a:ext>
+            </a:extLst>
+          </p:cNvPr>
+          <p:cNvPicPr>
+            <a:picLocks noChangeAspect="1"/>
+          </p:cNvPicPr>
+          <p:nvPr/>
+        </p:nvPicPr>
+        <p:blipFill>
+          <a:blip r:embed="rId3"/>
+          <a:stretch>
+            <a:fillRect/>
+          </a:stretch>
+        </p:blipFill>
+        <p:spPr>
+          <a:xfrm>
+            <a:off x="3488460" y="988354"/>
+            <a:ext cx="5217555" cy="4750904"/>
+          </a:xfrm>
+          <a:prstGeom prst="rect">
+            <a:avLst/>
+          </a:prstGeom>
+        </p:spPr>
+      </p:pic>
+    </p:spTree>
+    <p:extLst>
+      <p:ext uri="{BB962C8B-B14F-4D97-AF65-F5344CB8AC3E}">
+        <p14:creationId xmlns:p14="http://schemas.microsoft.com/office/powerpoint/2010/main" val="442116445"/>
+      </p:ext>
+    </p:extLst>
+  </p:cSld>
+  <p:clrMapOvr>
+    <a:masterClrMapping/>
+  </p:clrMapOvr>
+</p:sld>
+</file>
+
+<file path=ppt/slides/slide11.xml><?xml version="1.0" encoding="utf-8"?>
+<p:sld xmlns:a="http://schemas.openxmlformats.org/drawingml/2006/main" xmlns:r="http://schemas.openxmlformats.org/officeDocument/2006/relationships" xmlns:p="http://schemas.openxmlformats.org/presentationml/2006/main">
+  <p:cSld>
+    <p:spTree>
+      <p:nvGrpSpPr>
+        <p:cNvPr id="1" name=""/>
+        <p:cNvGrpSpPr/>
+        <p:nvPr/>
+      </p:nvGrpSpPr>
+      <p:grpSpPr>
+        <a:xfrm>
+          <a:off x="0" y="0"/>
+          <a:ext cx="0" cy="0"/>
+          <a:chOff x="0" y="0"/>
+          <a:chExt cx="0" cy="0"/>
+        </a:xfrm>
+      </p:grpSpPr>
+      <p:sp>
+        <p:nvSpPr>
           <p:cNvPr id="2" name="Title 1"/>
           <p:cNvSpPr>
             <a:spLocks noGrp="1"/>
@@ -9452,7 +9688,7 @@
 </p:sld>
 </file>
 
-<file path=ppt/slides/slide11.xml><?xml version="1.0" encoding="utf-8"?>
+<file path=ppt/slides/slide12.xml><?xml version="1.0" encoding="utf-8"?>
 <p:sld xmlns:a="http://schemas.openxmlformats.org/drawingml/2006/main" xmlns:r="http://schemas.openxmlformats.org/officeDocument/2006/relationships" xmlns:p="http://schemas.openxmlformats.org/presentationml/2006/main">
   <p:cSld>
     <p:spTree>
@@ -10700,7 +10936,7 @@
 </p:sld>
 </file>
 
-<file path=ppt/slides/slide12.xml><?xml version="1.0" encoding="utf-8"?>
+<file path=ppt/slides/slide13.xml><?xml version="1.0" encoding="utf-8"?>
 <p:sld xmlns:a="http://schemas.openxmlformats.org/drawingml/2006/main" xmlns:r="http://schemas.openxmlformats.org/officeDocument/2006/relationships" xmlns:p="http://schemas.openxmlformats.org/presentationml/2006/main" show="0">
   <p:cSld>
     <p:spTree>
@@ -11415,7 +11651,170 @@
           <a:p>
             <a:r>
               <a:rPr lang="en-US" dirty="0"/>
-              <a:t>Tell me, what is it you truly desire …</a:t>
+              <a:t>So tell me…</a:t>
+            </a:r>
+          </a:p>
+        </p:txBody>
+      </p:sp>
+      <p:pic>
+        <p:nvPicPr>
+          <p:cNvPr id="9" name="Picture 8">
+            <a:extLst>
+              <a:ext uri="{FF2B5EF4-FFF2-40B4-BE49-F238E27FC236}">
+                <a16:creationId xmlns:a16="http://schemas.microsoft.com/office/drawing/2014/main" id="{726EC35F-FB30-42DA-B9B9-ADC511AFC363}"/>
+              </a:ext>
+            </a:extLst>
+          </p:cNvPr>
+          <p:cNvPicPr>
+            <a:picLocks noChangeAspect="1"/>
+          </p:cNvPicPr>
+          <p:nvPr/>
+        </p:nvPicPr>
+        <p:blipFill>
+          <a:blip r:embed="rId3"/>
+          <a:stretch>
+            <a:fillRect/>
+          </a:stretch>
+        </p:blipFill>
+        <p:spPr>
+          <a:xfrm>
+            <a:off x="824593" y="1477735"/>
+            <a:ext cx="6252063" cy="3526972"/>
+          </a:xfrm>
+          <a:prstGeom prst="rect">
+            <a:avLst/>
+          </a:prstGeom>
+        </p:spPr>
+      </p:pic>
+      <p:sp>
+        <p:nvSpPr>
+          <p:cNvPr id="10" name="Speech Bubble: Oval 9">
+            <a:extLst>
+              <a:ext uri="{FF2B5EF4-FFF2-40B4-BE49-F238E27FC236}">
+                <a16:creationId xmlns:a16="http://schemas.microsoft.com/office/drawing/2014/main" id="{F89EAE71-D374-4898-B505-86C9A28A6383}"/>
+              </a:ext>
+            </a:extLst>
+          </p:cNvPr>
+          <p:cNvSpPr/>
+          <p:nvPr/>
+        </p:nvSpPr>
+        <p:spPr bwMode="gray">
+          <a:xfrm>
+            <a:off x="6506936" y="1232807"/>
+            <a:ext cx="4863646" cy="3239520"/>
+          </a:xfrm>
+          <a:prstGeom prst="wedgeEllipseCallout">
+            <a:avLst>
+              <a:gd name="adj1" fmla="val 48183"/>
+              <a:gd name="adj2" fmla="val 84876"/>
+            </a:avLst>
+          </a:prstGeom>
+          <a:solidFill>
+            <a:schemeClr val="bg1"/>
+          </a:solidFill>
+          <a:ln w="6350" algn="ctr">
+            <a:solidFill>
+              <a:schemeClr val="tx1"/>
+            </a:solidFill>
+            <a:miter lim="800000"/>
+            <a:headEnd/>
+            <a:tailEnd/>
+          </a:ln>
+        </p:spPr>
+        <p:txBody>
+          <a:bodyPr lIns="90000" tIns="72000" rIns="90000" bIns="72000" rtlCol="0" anchor="ctr"/>
+          <a:lstStyle/>
+          <a:p>
+            <a:pPr marR="0" algn="ctr" defTabSz="914400" eaLnBrk="1" fontAlgn="base" latinLnBrk="0" hangingPunct="1">
+              <a:lnSpc>
+                <a:spcPct val="100000"/>
+              </a:lnSpc>
+              <a:spcBef>
+                <a:spcPct val="50000"/>
+              </a:spcBef>
+              <a:spcAft>
+                <a:spcPct val="0"/>
+              </a:spcAft>
+              <a:buClr>
+                <a:srgbClr val="F0AB00"/>
+              </a:buClr>
+              <a:buSzPct val="80000"/>
+              <a:tabLst/>
+            </a:pPr>
+            <a:r>
+              <a:rPr kumimoji="0" lang="en-US" sz="1800" b="0" i="0" u="none" strike="noStrike" kern="0" cap="none" spc="0" normalizeH="0" baseline="0" noProof="0" dirty="0">
+                <a:ln>
+                  <a:noFill/>
+                </a:ln>
+                <a:effectLst/>
+                <a:uLnTx/>
+                <a:uFillTx/>
+                <a:ea typeface="Arial Unicode MS" pitchFamily="34" charset="-128"/>
+                <a:cs typeface="Arial Unicode MS" pitchFamily="34" charset="-128"/>
+              </a:rPr>
+              <a:t>I’ve always dreamt of having four instances of my awesome software that would restart automatically, have reliable load balancing and persistent disks without me having to overlook the whole thing all the time…</a:t>
+            </a:r>
+            <a:endParaRPr kumimoji="0" lang="en-DE" sz="1800" b="0" i="0" u="none" strike="noStrike" kern="0" cap="none" spc="0" normalizeH="0" baseline="0" noProof="0" dirty="0" err="1">
+              <a:ln>
+                <a:noFill/>
+              </a:ln>
+              <a:effectLst/>
+              <a:uLnTx/>
+              <a:uFillTx/>
+              <a:ea typeface="Arial Unicode MS" pitchFamily="34" charset="-128"/>
+              <a:cs typeface="Arial Unicode MS" pitchFamily="34" charset="-128"/>
+            </a:endParaRPr>
+          </a:p>
+        </p:txBody>
+      </p:sp>
+    </p:spTree>
+    <p:extLst>
+      <p:ext uri="{BB962C8B-B14F-4D97-AF65-F5344CB8AC3E}">
+        <p14:creationId xmlns:p14="http://schemas.microsoft.com/office/powerpoint/2010/main" val="3572379409"/>
+      </p:ext>
+    </p:extLst>
+  </p:cSld>
+  <p:clrMapOvr>
+    <a:masterClrMapping/>
+  </p:clrMapOvr>
+</p:sld>
+</file>
+
+<file path=ppt/slides/slide5.xml><?xml version="1.0" encoding="utf-8"?>
+<p:sld xmlns:a="http://schemas.openxmlformats.org/drawingml/2006/main" xmlns:r="http://schemas.openxmlformats.org/officeDocument/2006/relationships" xmlns:p="http://schemas.openxmlformats.org/presentationml/2006/main">
+  <p:cSld>
+    <p:spTree>
+      <p:nvGrpSpPr>
+        <p:cNvPr id="1" name=""/>
+        <p:cNvGrpSpPr/>
+        <p:nvPr/>
+      </p:nvGrpSpPr>
+      <p:grpSpPr>
+        <a:xfrm>
+          <a:off x="0" y="0"/>
+          <a:ext cx="0" cy="0"/>
+          <a:chOff x="0" y="0"/>
+          <a:chExt cx="0" cy="0"/>
+        </a:xfrm>
+      </p:grpSpPr>
+      <p:sp>
+        <p:nvSpPr>
+          <p:cNvPr id="5" name="Title 4"/>
+          <p:cNvSpPr>
+            <a:spLocks noGrp="1"/>
+          </p:cNvSpPr>
+          <p:nvPr>
+            <p:ph type="title"/>
+          </p:nvPr>
+        </p:nvSpPr>
+        <p:spPr/>
+        <p:txBody>
+          <a:bodyPr/>
+          <a:lstStyle/>
+          <a:p>
+            <a:r>
+              <a:rPr lang="en-US" dirty="0"/>
+              <a:t>Tell me, what is it you truly desire…</a:t>
             </a:r>
           </a:p>
         </p:txBody>
@@ -11597,7 +11996,7 @@
     </p:spTree>
     <p:extLst>
       <p:ext uri="{BB962C8B-B14F-4D97-AF65-F5344CB8AC3E}">
-        <p14:creationId xmlns:p14="http://schemas.microsoft.com/office/powerpoint/2010/main" val="3572379409"/>
+        <p14:creationId xmlns:p14="http://schemas.microsoft.com/office/powerpoint/2010/main" val="3497478471"/>
       </p:ext>
     </p:extLst>
   </p:cSld>
@@ -11607,7 +12006,7 @@
 </p:sld>
 </file>
 
-<file path=ppt/slides/slide5.xml><?xml version="1.0" encoding="utf-8"?>
+<file path=ppt/slides/slide6.xml><?xml version="1.0" encoding="utf-8"?>
 <p:sld xmlns:a="http://schemas.openxmlformats.org/drawingml/2006/main" xmlns:r="http://schemas.openxmlformats.org/officeDocument/2006/relationships" xmlns:p="http://schemas.openxmlformats.org/presentationml/2006/main">
   <p:cSld>
     <p:spTree>
@@ -11765,7 +12164,7 @@
 </p:sld>
 </file>
 
-<file path=ppt/slides/slide6.xml><?xml version="1.0" encoding="utf-8"?>
+<file path=ppt/slides/slide7.xml><?xml version="1.0" encoding="utf-8"?>
 <p:sld xmlns:a="http://schemas.openxmlformats.org/drawingml/2006/main" xmlns:r="http://schemas.openxmlformats.org/officeDocument/2006/relationships" xmlns:p="http://schemas.openxmlformats.org/presentationml/2006/main">
   <p:cSld>
     <p:spTree>
@@ -12571,7 +12970,7 @@
 </p:sld>
 </file>
 
-<file path=ppt/slides/slide7.xml><?xml version="1.0" encoding="utf-8"?>
+<file path=ppt/slides/slide8.xml><?xml version="1.0" encoding="utf-8"?>
 <p:sld xmlns:a="http://schemas.openxmlformats.org/drawingml/2006/main" xmlns:r="http://schemas.openxmlformats.org/officeDocument/2006/relationships" xmlns:p="http://schemas.openxmlformats.org/presentationml/2006/main">
   <p:cSld>
     <p:spTree>
@@ -12803,7 +13202,7 @@
 </p:sld>
 </file>
 
-<file path=ppt/slides/slide8.xml><?xml version="1.0" encoding="utf-8"?>
+<file path=ppt/slides/slide9.xml><?xml version="1.0" encoding="utf-8"?>
 <p:sld xmlns:a="http://schemas.openxmlformats.org/drawingml/2006/main" xmlns:r="http://schemas.openxmlformats.org/officeDocument/2006/relationships" xmlns:p="http://schemas.openxmlformats.org/presentationml/2006/main">
   <p:cSld>
     <p:spTree>
@@ -13127,147 +13526,6 @@
     <p:extLst>
       <p:ext uri="{BB962C8B-B14F-4D97-AF65-F5344CB8AC3E}">
         <p14:creationId xmlns:p14="http://schemas.microsoft.com/office/powerpoint/2010/main" val="3263224504"/>
-      </p:ext>
-    </p:extLst>
-  </p:cSld>
-  <p:clrMapOvr>
-    <a:masterClrMapping/>
-  </p:clrMapOvr>
-</p:sld>
-</file>
-
-<file path=ppt/slides/slide9.xml><?xml version="1.0" encoding="utf-8"?>
-<p:sld xmlns:a="http://schemas.openxmlformats.org/drawingml/2006/main" xmlns:r="http://schemas.openxmlformats.org/officeDocument/2006/relationships" xmlns:p="http://schemas.openxmlformats.org/presentationml/2006/main">
-  <p:cSld>
-    <p:spTree>
-      <p:nvGrpSpPr>
-        <p:cNvPr id="1" name=""/>
-        <p:cNvGrpSpPr/>
-        <p:nvPr/>
-      </p:nvGrpSpPr>
-      <p:grpSpPr>
-        <a:xfrm>
-          <a:off x="0" y="0"/>
-          <a:ext cx="0" cy="0"/>
-          <a:chOff x="0" y="0"/>
-          <a:chExt cx="0" cy="0"/>
-        </a:xfrm>
-      </p:grpSpPr>
-      <p:sp>
-        <p:nvSpPr>
-          <p:cNvPr id="2" name="Title 1">
-            <a:extLst>
-              <a:ext uri="{FF2B5EF4-FFF2-40B4-BE49-F238E27FC236}">
-                <a16:creationId xmlns:a16="http://schemas.microsoft.com/office/drawing/2014/main" id="{E582B548-5EEB-4E4A-A8E4-F449F9422596}"/>
-              </a:ext>
-            </a:extLst>
-          </p:cNvPr>
-          <p:cNvSpPr>
-            <a:spLocks noGrp="1"/>
-          </p:cNvSpPr>
-          <p:nvPr>
-            <p:ph type="title"/>
-          </p:nvPr>
-        </p:nvSpPr>
-        <p:spPr/>
-        <p:txBody>
-          <a:bodyPr/>
-          <a:lstStyle/>
-          <a:p>
-            <a:r>
-              <a:rPr lang="en-US" dirty="0"/>
-              <a:t>Documentation</a:t>
-            </a:r>
-          </a:p>
-        </p:txBody>
-      </p:sp>
-      <p:sp>
-        <p:nvSpPr>
-          <p:cNvPr id="3" name="Rectangle 2">
-            <a:extLst>
-              <a:ext uri="{FF2B5EF4-FFF2-40B4-BE49-F238E27FC236}">
-                <a16:creationId xmlns:a16="http://schemas.microsoft.com/office/drawing/2014/main" id="{8D2E5199-2E3E-4166-A8DB-D5A7DE841F4C}"/>
-              </a:ext>
-            </a:extLst>
-          </p:cNvPr>
-          <p:cNvSpPr/>
-          <p:nvPr/>
-        </p:nvSpPr>
-        <p:spPr>
-          <a:xfrm>
-            <a:off x="2394050" y="5739258"/>
-            <a:ext cx="7406377" cy="369332"/>
-          </a:xfrm>
-          <a:prstGeom prst="rect">
-            <a:avLst/>
-          </a:prstGeom>
-        </p:spPr>
-        <p:txBody>
-          <a:bodyPr wrap="square">
-            <a:spAutoFit/>
-          </a:bodyPr>
-          <a:lstStyle/>
-          <a:p>
-            <a:pPr algn="ctr"/>
-            <a:r>
-              <a:rPr lang="de-DE" sz="1800" dirty="0">
-                <a:solidFill>
-                  <a:srgbClr val="000000"/>
-                </a:solidFill>
-                <a:latin typeface="+mj-lt"/>
-                <a:hlinkClick r:id="rId2"/>
-              </a:rPr>
-              <a:t>https://twitter.com/memenetes/status/1305612451443023876?s=20</a:t>
-            </a:r>
-            <a:r>
-              <a:rPr lang="de-DE" sz="1800" dirty="0">
-                <a:solidFill>
-                  <a:srgbClr val="000000"/>
-                </a:solidFill>
-                <a:latin typeface="+mj-lt"/>
-              </a:rPr>
-              <a:t> </a:t>
-            </a:r>
-            <a:endParaRPr lang="en-US" sz="1800" dirty="0">
-              <a:latin typeface="+mj-lt"/>
-            </a:endParaRPr>
-          </a:p>
-        </p:txBody>
-      </p:sp>
-      <p:pic>
-        <p:nvPicPr>
-          <p:cNvPr id="4" name="Picture 3">
-            <a:extLst>
-              <a:ext uri="{FF2B5EF4-FFF2-40B4-BE49-F238E27FC236}">
-                <a16:creationId xmlns:a16="http://schemas.microsoft.com/office/drawing/2014/main" id="{0B682552-E443-46F1-8B3B-E9EA8D5CEBE7}"/>
-              </a:ext>
-            </a:extLst>
-          </p:cNvPr>
-          <p:cNvPicPr>
-            <a:picLocks noChangeAspect="1"/>
-          </p:cNvPicPr>
-          <p:nvPr/>
-        </p:nvPicPr>
-        <p:blipFill>
-          <a:blip r:embed="rId3"/>
-          <a:stretch>
-            <a:fillRect/>
-          </a:stretch>
-        </p:blipFill>
-        <p:spPr>
-          <a:xfrm>
-            <a:off x="3488460" y="988354"/>
-            <a:ext cx="5217555" cy="4750904"/>
-          </a:xfrm>
-          <a:prstGeom prst="rect">
-            <a:avLst/>
-          </a:prstGeom>
-        </p:spPr>
-      </p:pic>
-    </p:spTree>
-    <p:extLst>
-      <p:ext uri="{BB962C8B-B14F-4D97-AF65-F5344CB8AC3E}">
-        <p14:creationId xmlns:p14="http://schemas.microsoft.com/office/powerpoint/2010/main" val="442116445"/>
       </p:ext>
     </p:extLst>
   </p:cSld>
